--- a/dashboard/public/presentations/qlc-tlc-market-entry.pptx
+++ b/dashboard/public/presentations/qlc-tlc-market-entry.pptx
@@ -3893,7 +3893,7 @@
             <a:r>
               <a:rPr sz="1800" b="1">
                 <a:solidFill>
-                  <a:srgbClr val="1428A0"/>
+                  <a:srgbClr val="3C4FA5"/>
                 </a:solidFill>
                 <a:latin typeface="Arial"/>
                 <a:ea typeface="Arial"/>
@@ -4069,7 +4069,7 @@
             <a:avLst/>
           </a:prstGeom>
           <a:solidFill>
-            <a:srgbClr val="1428A0"/>
+            <a:srgbClr val="3C4FA5"/>
           </a:solidFill>
           <a:ln>
             <a:noFill/>
@@ -4507,7 +4507,7 @@
           </a:prstGeom>
           <a:ln w="38100">
             <a:solidFill>
-              <a:srgbClr val="1428A0"/>
+              <a:srgbClr val="3C4FA5"/>
             </a:solidFill>
           </a:ln>
         </p:spPr>
@@ -4541,7 +4541,7 @@
             <a:avLst/>
           </a:prstGeom>
           <a:solidFill>
-            <a:srgbClr val="1428A0"/>
+            <a:srgbClr val="3C4FA5"/>
           </a:solidFill>
           <a:ln>
             <a:noFill/>
@@ -4585,7 +4585,7 @@
             <a:avLst/>
           </a:prstGeom>
           <a:solidFill>
-            <a:srgbClr val="1428A0"/>
+            <a:srgbClr val="3C4FA5"/>
           </a:solidFill>
           <a:ln>
             <a:noFill/>
@@ -4684,7 +4684,7 @@
             <a:r>
               <a:rPr sz="1800" b="1">
                 <a:solidFill>
-                  <a:srgbClr val="1428A0"/>
+                  <a:srgbClr val="3C4FA5"/>
                 </a:solidFill>
                 <a:latin typeface="Arial"/>
                 <a:ea typeface="Arial"/>
@@ -4813,7 +4813,7 @@
             <a:avLst/>
           </a:prstGeom>
           <a:solidFill>
-            <a:srgbClr val="1428A0"/>
+            <a:srgbClr val="3C4FA5"/>
           </a:solidFill>
           <a:ln>
             <a:noFill/>
@@ -4906,7 +4906,7 @@
             <a:r>
               <a:rPr sz="2000" b="1">
                 <a:solidFill>
-                  <a:srgbClr val="1428A0"/>
+                  <a:srgbClr val="3C4FA5"/>
                 </a:solidFill>
                 <a:latin typeface="Arial"/>
                 <a:ea typeface="Arial"/>
@@ -5233,7 +5233,7 @@
             </a:avLst>
           </a:prstGeom>
           <a:solidFill>
-            <a:srgbClr val="1428A0"/>
+            <a:srgbClr val="3C4FA5"/>
           </a:solidFill>
           <a:ln>
             <a:noFill/>
@@ -5357,7 +5357,7 @@
             <a:avLst/>
           </a:prstGeom>
           <a:solidFill>
-            <a:srgbClr val="AAB8E8"/>
+            <a:srgbClr val="C0CAEC"/>
           </a:solidFill>
           <a:ln>
             <a:noFill/>
@@ -5401,7 +5401,7 @@
             <a:avLst/>
           </a:prstGeom>
           <a:solidFill>
-            <a:srgbClr val="1428A0"/>
+            <a:srgbClr val="3C4FA5"/>
           </a:solidFill>
           <a:ln>
             <a:noFill/>
@@ -5699,7 +5699,7 @@
             <a:avLst/>
           </a:prstGeom>
           <a:solidFill>
-            <a:srgbClr val="1428A0"/>
+            <a:srgbClr val="3C4FA5"/>
           </a:solidFill>
           <a:ln>
             <a:noFill/>
@@ -5758,7 +5758,7 @@
             <a:r>
               <a:rPr sz="2400" b="1">
                 <a:solidFill>
-                  <a:srgbClr val="1428A0"/>
+                  <a:srgbClr val="3C4FA5"/>
                 </a:solidFill>
                 <a:latin typeface="Arial"/>
                 <a:ea typeface="Arial"/>
@@ -5838,7 +5838,7 @@
             <a:r>
               <a:rPr sz="2600" b="1">
                 <a:solidFill>
-                  <a:srgbClr val="1428A0"/>
+                  <a:srgbClr val="3C4FA5"/>
                 </a:solidFill>
                 <a:latin typeface="Arial"/>
                 <a:ea typeface="Arial"/>
@@ -5962,7 +5962,7 @@
             <a:r>
               <a:rPr sz="2600" b="1">
                 <a:solidFill>
-                  <a:srgbClr val="1428A0"/>
+                  <a:srgbClr val="3C4FA5"/>
                 </a:solidFill>
                 <a:latin typeface="Arial"/>
                 <a:ea typeface="Arial"/>
@@ -5972,7 +5972,7 @@
             <a:r>
               <a:rPr sz="4800" b="1">
                 <a:solidFill>
-                  <a:srgbClr val="1428A0"/>
+                  <a:srgbClr val="3C4FA5"/>
                 </a:solidFill>
                 <a:latin typeface="Arial"/>
                 <a:ea typeface="Arial"/>
@@ -5982,7 +5982,7 @@
             <a:r>
               <a:rPr sz="2600" b="1">
                 <a:solidFill>
-                  <a:srgbClr val="1428A0"/>
+                  <a:srgbClr val="3C4FA5"/>
                 </a:solidFill>
                 <a:latin typeface="Arial"/>
                 <a:ea typeface="Arial"/>
@@ -6062,7 +6062,7 @@
             <a:r>
               <a:rPr sz="1800" b="1">
                 <a:solidFill>
-                  <a:srgbClr val="1428A0"/>
+                  <a:srgbClr val="3C4FA5"/>
                 </a:solidFill>
                 <a:latin typeface="Arial"/>
                 <a:ea typeface="Arial"/>
@@ -6087,7 +6087,7 @@
             <a:avLst/>
           </a:prstGeom>
           <a:solidFill>
-            <a:srgbClr val="AAB8E8"/>
+            <a:srgbClr val="C0CAEC"/>
           </a:solidFill>
           <a:ln>
             <a:noFill/>
@@ -6131,7 +6131,7 @@
             <a:avLst/>
           </a:prstGeom>
           <a:solidFill>
-            <a:srgbClr val="1428A0"/>
+            <a:srgbClr val="3C4FA5"/>
           </a:solidFill>
           <a:ln>
             <a:noFill/>
@@ -8257,7 +8257,7 @@
             <a:avLst/>
           </a:prstGeom>
           <a:solidFill>
-            <a:srgbClr val="1428A0"/>
+            <a:srgbClr val="3C4FA5"/>
           </a:solidFill>
           <a:ln>
             <a:noFill/>
@@ -8301,7 +8301,7 @@
             <a:avLst/>
           </a:prstGeom>
           <a:solidFill>
-            <a:srgbClr val="1428A0"/>
+            <a:srgbClr val="3C4FA5"/>
           </a:solidFill>
           <a:ln>
             <a:noFill/>
@@ -8345,7 +8345,7 @@
             <a:avLst/>
           </a:prstGeom>
           <a:solidFill>
-            <a:srgbClr val="1428A0"/>
+            <a:srgbClr val="3C4FA5"/>
           </a:solidFill>
           <a:ln>
             <a:noFill/>
@@ -8389,7 +8389,7 @@
             <a:avLst/>
           </a:prstGeom>
           <a:solidFill>
-            <a:srgbClr val="1428A0"/>
+            <a:srgbClr val="3C4FA5"/>
           </a:solidFill>
           <a:ln>
             <a:noFill/>
@@ -8433,7 +8433,7 @@
             <a:avLst/>
           </a:prstGeom>
           <a:solidFill>
-            <a:srgbClr val="1428A0"/>
+            <a:srgbClr val="3C4FA5"/>
           </a:solidFill>
           <a:ln>
             <a:noFill/>
@@ -8477,7 +8477,7 @@
             <a:avLst/>
           </a:prstGeom>
           <a:solidFill>
-            <a:srgbClr val="1428A0"/>
+            <a:srgbClr val="3C4FA5"/>
           </a:solidFill>
           <a:ln>
             <a:noFill/>
@@ -8521,7 +8521,7 @@
             <a:avLst/>
           </a:prstGeom>
           <a:solidFill>
-            <a:srgbClr val="1428A0"/>
+            <a:srgbClr val="3C4FA5"/>
           </a:solidFill>
           <a:ln>
             <a:noFill/>
@@ -8569,7 +8569,7 @@
           </a:solidFill>
           <a:ln w="19050">
             <a:solidFill>
-              <a:srgbClr val="1428A0"/>
+              <a:srgbClr val="3C4FA5"/>
             </a:solidFill>
           </a:ln>
           <a:effectLst/>
@@ -8615,7 +8615,7 @@
           </a:solidFill>
           <a:ln w="19050">
             <a:solidFill>
-              <a:srgbClr val="1428A0"/>
+              <a:srgbClr val="3C4FA5"/>
             </a:solidFill>
           </a:ln>
           <a:effectLst/>
@@ -8657,7 +8657,7 @@
             <a:avLst/>
           </a:prstGeom>
           <a:solidFill>
-            <a:srgbClr val="1428A0"/>
+            <a:srgbClr val="3C4FA5"/>
           </a:solidFill>
           <a:ln>
             <a:noFill/>
@@ -8716,7 +8716,7 @@
             <a:r>
               <a:rPr sz="2400" b="1">
                 <a:solidFill>
-                  <a:srgbClr val="1428A0"/>
+                  <a:srgbClr val="3C4FA5"/>
                 </a:solidFill>
                 <a:latin typeface="Arial"/>
                 <a:ea typeface="Arial"/>
@@ -8741,7 +8741,7 @@
             <a:avLst/>
           </a:prstGeom>
           <a:solidFill>
-            <a:srgbClr val="1428A0"/>
+            <a:srgbClr val="3C4FA5"/>
           </a:solidFill>
           <a:ln>
             <a:noFill/>
@@ -8785,7 +8785,7 @@
             <a:avLst/>
           </a:prstGeom>
           <a:solidFill>
-            <a:srgbClr val="1428A0"/>
+            <a:srgbClr val="3C4FA5"/>
           </a:solidFill>
           <a:ln>
             <a:noFill/>
@@ -8844,7 +8844,7 @@
             <a:r>
               <a:rPr sz="2400" b="1">
                 <a:solidFill>
-                  <a:srgbClr val="1428A0"/>
+                  <a:srgbClr val="3C4FA5"/>
                 </a:solidFill>
                 <a:latin typeface="Arial"/>
                 <a:ea typeface="Arial"/>
@@ -8869,7 +8869,7 @@
             <a:avLst/>
           </a:prstGeom>
           <a:solidFill>
-            <a:srgbClr val="1428A0"/>
+            <a:srgbClr val="3C4FA5"/>
           </a:solidFill>
           <a:ln>
             <a:noFill/>
@@ -8913,7 +8913,7 @@
             <a:avLst/>
           </a:prstGeom>
           <a:solidFill>
-            <a:srgbClr val="1428A0"/>
+            <a:srgbClr val="3C4FA5"/>
           </a:solidFill>
           <a:ln>
             <a:noFill/>
@@ -8972,7 +8972,7 @@
             <a:r>
               <a:rPr sz="2400" b="1">
                 <a:solidFill>
-                  <a:srgbClr val="1428A0"/>
+                  <a:srgbClr val="3C4FA5"/>
                 </a:solidFill>
                 <a:latin typeface="Arial"/>
                 <a:ea typeface="Arial"/>
@@ -9012,7 +9012,7 @@
             <a:r>
               <a:rPr sz="1600" b="1">
                 <a:solidFill>
-                  <a:srgbClr val="1428A0"/>
+                  <a:srgbClr val="3C4FA5"/>
                 </a:solidFill>
                 <a:latin typeface="Arial"/>
                 <a:ea typeface="Arial"/>
@@ -9054,7 +9054,7 @@
             <a:avLst/>
           </a:prstGeom>
           <a:solidFill>
-            <a:srgbClr val="1428A0"/>
+            <a:srgbClr val="3C4FA5"/>
           </a:solidFill>
           <a:ln>
             <a:noFill/>
@@ -9113,7 +9113,7 @@
             <a:r>
               <a:rPr sz="2000" b="0">
                 <a:solidFill>
-                  <a:srgbClr val="AAB8E8"/>
+                  <a:srgbClr val="C0CAEC"/>
                 </a:solidFill>
                 <a:latin typeface="Arial"/>
                 <a:ea typeface="Arial"/>
@@ -9291,7 +9291,7 @@
             <a:r>
               <a:rPr sz="1800" b="1">
                 <a:solidFill>
-                  <a:srgbClr val="1428A0"/>
+                  <a:srgbClr val="3C4FA5"/>
                 </a:solidFill>
                 <a:latin typeface="Arial"/>
                 <a:ea typeface="Arial"/>
@@ -9467,7 +9467,7 @@
             <a:avLst/>
           </a:prstGeom>
           <a:solidFill>
-            <a:srgbClr val="1428A0"/>
+            <a:srgbClr val="3C4FA5"/>
           </a:solidFill>
           <a:ln>
             <a:noFill/>
@@ -10496,7 +10496,7 @@
             <a:r>
               <a:rPr sz="1800" b="1">
                 <a:solidFill>
-                  <a:srgbClr val="1428A0"/>
+                  <a:srgbClr val="3C4FA5"/>
                 </a:solidFill>
                 <a:latin typeface="Arial"/>
                 <a:ea typeface="Arial"/>
@@ -10565,7 +10565,7 @@
             <a:avLst/>
           </a:prstGeom>
           <a:solidFill>
-            <a:srgbClr val="1428A0"/>
+            <a:srgbClr val="3C4FA5"/>
           </a:solidFill>
           <a:ln>
             <a:noFill/>
@@ -10624,7 +10624,7 @@
             <a:r>
               <a:rPr sz="1600" b="1">
                 <a:solidFill>
-                  <a:srgbClr val="1428A0"/>
+                  <a:srgbClr val="3C4FA5"/>
                 </a:solidFill>
                 <a:latin typeface="Arial"/>
                 <a:ea typeface="Arial"/>
@@ -10664,7 +10664,7 @@
             <a:r>
               <a:rPr sz="2000" b="1">
                 <a:solidFill>
-                  <a:srgbClr val="1428A0"/>
+                  <a:srgbClr val="3C4FA5"/>
                 </a:solidFill>
                 <a:latin typeface="Arial"/>
                 <a:ea typeface="Arial"/>
@@ -10922,7 +10922,7 @@
             <a:r>
               <a:rPr sz="1800" b="1">
                 <a:solidFill>
-                  <a:srgbClr val="1428A0"/>
+                  <a:srgbClr val="3C4FA5"/>
                 </a:solidFill>
                 <a:latin typeface="Arial"/>
                 <a:ea typeface="Arial"/>
@@ -10947,7 +10947,7 @@
             <a:avLst/>
           </a:prstGeom>
           <a:solidFill>
-            <a:srgbClr val="1428A0"/>
+            <a:srgbClr val="3C4FA5"/>
           </a:solidFill>
           <a:ln>
             <a:noFill/>
@@ -11006,7 +11006,7 @@
             <a:r>
               <a:rPr sz="1800" b="1">
                 <a:solidFill>
-                  <a:srgbClr val="1428A0"/>
+                  <a:srgbClr val="3C4FA5"/>
                 </a:solidFill>
                 <a:latin typeface="Arial"/>
                 <a:ea typeface="Arial"/>
@@ -11350,7 +11350,7 @@
             <a:r>
               <a:rPr sz="1800" b="1">
                 <a:solidFill>
-                  <a:srgbClr val="1428A0"/>
+                  <a:srgbClr val="3C4FA5"/>
                 </a:solidFill>
                 <a:latin typeface="Arial"/>
                 <a:ea typeface="Arial"/>
@@ -11375,7 +11375,7 @@
             <a:avLst/>
           </a:prstGeom>
           <a:solidFill>
-            <a:srgbClr val="AAB8E8"/>
+            <a:srgbClr val="C0CAEC"/>
           </a:solidFill>
           <a:ln>
             <a:noFill/>
@@ -11419,7 +11419,7 @@
             <a:avLst/>
           </a:prstGeom>
           <a:solidFill>
-            <a:srgbClr val="1428A0"/>
+            <a:srgbClr val="3C4FA5"/>
           </a:solidFill>
           <a:ln>
             <a:noFill/>
@@ -11839,7 +11839,7 @@
             </a:avLst>
           </a:prstGeom>
           <a:solidFill>
-            <a:srgbClr val="1428A0"/>
+            <a:srgbClr val="3C4FA5"/>
           </a:solidFill>
           <a:ln>
             <a:noFill/>
@@ -11915,7 +11915,7 @@
             <a:r>
               <a:rPr sz="1600" b="0">
                 <a:solidFill>
-                  <a:srgbClr val="AAB8E8"/>
+                  <a:srgbClr val="C0CAEC"/>
                 </a:solidFill>
                 <a:latin typeface="Arial"/>
                 <a:ea typeface="Arial"/>
@@ -12154,7 +12154,7 @@
             <a:avLst/>
           </a:prstGeom>
           <a:solidFill>
-            <a:srgbClr val="1428A0"/>
+            <a:srgbClr val="3C4FA5"/>
           </a:solidFill>
           <a:ln>
             <a:noFill/>
@@ -12213,7 +12213,7 @@
             <a:r>
               <a:rPr sz="1800" b="1">
                 <a:solidFill>
-                  <a:srgbClr val="1428A0"/>
+                  <a:srgbClr val="3C4FA5"/>
                 </a:solidFill>
                 <a:latin typeface="Arial"/>
                 <a:ea typeface="Arial"/>
@@ -12402,7 +12402,7 @@
             <a:avLst/>
           </a:prstGeom>
           <a:solidFill>
-            <a:srgbClr val="1428A0"/>
+            <a:srgbClr val="3C4FA5"/>
           </a:solidFill>
           <a:ln>
             <a:noFill/>
@@ -12461,7 +12461,7 @@
             <a:r>
               <a:rPr sz="1800" b="1">
                 <a:solidFill>
-                  <a:srgbClr val="1428A0"/>
+                  <a:srgbClr val="3C4FA5"/>
                 </a:solidFill>
                 <a:latin typeface="Arial"/>
                 <a:ea typeface="Arial"/>
@@ -12650,7 +12650,7 @@
             <a:avLst/>
           </a:prstGeom>
           <a:solidFill>
-            <a:srgbClr val="1428A0"/>
+            <a:srgbClr val="3C4FA5"/>
           </a:solidFill>
           <a:ln>
             <a:noFill/>
@@ -12709,7 +12709,7 @@
             <a:r>
               <a:rPr sz="1800" b="1">
                 <a:solidFill>
-                  <a:srgbClr val="1428A0"/>
+                  <a:srgbClr val="3C4FA5"/>
                 </a:solidFill>
                 <a:latin typeface="Arial"/>
                 <a:ea typeface="Arial"/>
@@ -13056,7 +13056,7 @@
           </a:solidFill>
           <a:ln w="12700">
             <a:solidFill>
-              <a:srgbClr val="1428A0"/>
+              <a:srgbClr val="3C4FA5"/>
             </a:solidFill>
           </a:ln>
           <a:effectLst/>
@@ -13123,7 +13123,7 @@
             <a:r>
               <a:rPr sz="1600" b="1">
                 <a:solidFill>
-                  <a:srgbClr val="1428A0"/>
+                  <a:srgbClr val="3C4FA5"/>
                 </a:solidFill>
                 <a:latin typeface="Arial"/>
                 <a:ea typeface="Arial"/>
@@ -13148,7 +13148,7 @@
             <a:avLst/>
           </a:prstGeom>
           <a:solidFill>
-            <a:srgbClr val="1428A0"/>
+            <a:srgbClr val="3C4FA5"/>
           </a:solidFill>
           <a:ln>
             <a:noFill/>
@@ -13207,7 +13207,7 @@
             <a:r>
               <a:rPr sz="2000" b="0">
                 <a:solidFill>
-                  <a:srgbClr val="AAB8E8"/>
+                  <a:srgbClr val="C0CAEC"/>
                 </a:solidFill>
                 <a:latin typeface="Arial"/>
                 <a:ea typeface="Arial"/>
@@ -13385,7 +13385,7 @@
             <a:r>
               <a:rPr sz="1800" b="1">
                 <a:solidFill>
-                  <a:srgbClr val="1428A0"/>
+                  <a:srgbClr val="3C4FA5"/>
                 </a:solidFill>
                 <a:latin typeface="Arial"/>
                 <a:ea typeface="Arial"/>
@@ -13561,7 +13561,7 @@
             <a:avLst/>
           </a:prstGeom>
           <a:solidFill>
-            <a:srgbClr val="1428A0"/>
+            <a:srgbClr val="3C4FA5"/>
           </a:solidFill>
           <a:ln>
             <a:noFill/>
@@ -14374,7 +14374,7 @@
             <a:r>
               <a:rPr sz="1900" b="1">
                 <a:solidFill>
-                  <a:srgbClr val="1428A0"/>
+                  <a:srgbClr val="3C4FA5"/>
                 </a:solidFill>
                 <a:latin typeface="Arial"/>
                 <a:ea typeface="Arial"/>
@@ -14399,7 +14399,7 @@
             <a:avLst/>
           </a:prstGeom>
           <a:solidFill>
-            <a:srgbClr val="1428A0"/>
+            <a:srgbClr val="3C4FA5"/>
           </a:solidFill>
           <a:ln>
             <a:noFill/>
@@ -14443,7 +14443,7 @@
             <a:avLst/>
           </a:prstGeom>
           <a:solidFill>
-            <a:srgbClr val="AAB8E8"/>
+            <a:srgbClr val="C0CAEC"/>
           </a:solidFill>
           <a:ln>
             <a:noFill/>
@@ -14502,7 +14502,7 @@
             <a:r>
               <a:rPr sz="1600" b="1">
                 <a:solidFill>
-                  <a:srgbClr val="1428A0"/>
+                  <a:srgbClr val="3C4FA5"/>
                 </a:solidFill>
                 <a:latin typeface="Arial"/>
                 <a:ea typeface="Arial"/>
@@ -14655,7 +14655,7 @@
             <a:avLst/>
           </a:prstGeom>
           <a:solidFill>
-            <a:srgbClr val="1428A0"/>
+            <a:srgbClr val="3C4FA5"/>
           </a:solidFill>
           <a:ln>
             <a:noFill/>
@@ -15548,7 +15548,7 @@
             <a:r>
               <a:rPr sz="1800" b="1">
                 <a:solidFill>
-                  <a:srgbClr val="1428A0"/>
+                  <a:srgbClr val="3C4FA5"/>
                 </a:solidFill>
                 <a:latin typeface="Arial"/>
                 <a:ea typeface="Arial"/>
@@ -15613,7 +15613,7 @@
             <a:avLst/>
           </a:prstGeom>
           <a:solidFill>
-            <a:srgbClr val="1428A0"/>
+            <a:srgbClr val="3C4FA5"/>
           </a:solidFill>
           <a:ln>
             <a:noFill/>
@@ -15657,7 +15657,7 @@
             <a:avLst/>
           </a:prstGeom>
           <a:solidFill>
-            <a:srgbClr val="AAB8E8"/>
+            <a:srgbClr val="C0CAEC"/>
           </a:solidFill>
           <a:ln>
             <a:noFill/>
@@ -15716,7 +15716,7 @@
             <a:r>
               <a:rPr sz="1800" b="1">
                 <a:solidFill>
-                  <a:srgbClr val="1428A0"/>
+                  <a:srgbClr val="3C4FA5"/>
                 </a:solidFill>
                 <a:latin typeface="Arial"/>
                 <a:ea typeface="Arial"/>
@@ -15756,7 +15756,7 @@
             <a:r>
               <a:rPr sz="1600" b="1">
                 <a:solidFill>
-                  <a:srgbClr val="1428A0"/>
+                  <a:srgbClr val="3C4FA5"/>
                 </a:solidFill>
                 <a:latin typeface="Arial"/>
                 <a:ea typeface="Arial"/>
@@ -15781,7 +15781,7 @@
             <a:avLst/>
           </a:prstGeom>
           <a:solidFill>
-            <a:srgbClr val="1428A0"/>
+            <a:srgbClr val="3C4FA5"/>
           </a:solidFill>
           <a:ln>
             <a:noFill/>
@@ -16090,7 +16090,7 @@
             <a:r>
               <a:rPr sz="4000" b="1">
                 <a:solidFill>
-                  <a:srgbClr val="1428A0"/>
+                  <a:srgbClr val="3C4FA5"/>
                 </a:solidFill>
                 <a:latin typeface="Arial"/>
                 <a:ea typeface="Arial"/>
@@ -16100,7 +16100,7 @@
             <a:r>
               <a:rPr sz="2200" b="1">
                 <a:solidFill>
-                  <a:srgbClr val="1428A0"/>
+                  <a:srgbClr val="3C4FA5"/>
                 </a:solidFill>
                 <a:latin typeface="Arial"/>
                 <a:ea typeface="Arial"/>
@@ -16167,7 +16167,7 @@
             </a:avLst>
           </a:prstGeom>
           <a:solidFill>
-            <a:srgbClr val="EEF1FA"/>
+            <a:srgbClr val="F0F2F8"/>
           </a:solidFill>
           <a:ln>
             <a:noFill/>
@@ -16236,7 +16236,7 @@
             <a:r>
               <a:rPr sz="2000" b="1">
                 <a:solidFill>
-                  <a:srgbClr val="1428A0"/>
+                  <a:srgbClr val="3C4FA5"/>
                 </a:solidFill>
                 <a:latin typeface="Arial"/>
                 <a:ea typeface="Arial"/>
@@ -16449,7 +16449,7 @@
             <a:avLst/>
           </a:prstGeom>
           <a:solidFill>
-            <a:srgbClr val="1428A0"/>
+            <a:srgbClr val="3C4FA5"/>
           </a:solidFill>
           <a:ln>
             <a:noFill/>
@@ -16508,7 +16508,7 @@
             <a:r>
               <a:rPr sz="1600" b="1">
                 <a:solidFill>
-                  <a:srgbClr val="1428A0"/>
+                  <a:srgbClr val="3C4FA5"/>
                 </a:solidFill>
                 <a:latin typeface="Arial"/>
                 <a:ea typeface="Arial"/>
@@ -16617,7 +16617,7 @@
             <a:avLst/>
           </a:prstGeom>
           <a:solidFill>
-            <a:srgbClr val="1428A0"/>
+            <a:srgbClr val="3C4FA5"/>
           </a:solidFill>
           <a:ln>
             <a:noFill/>
@@ -16676,7 +16676,7 @@
             <a:r>
               <a:rPr sz="1600" b="1">
                 <a:solidFill>
-                  <a:srgbClr val="1428A0"/>
+                  <a:srgbClr val="3C4FA5"/>
                 </a:solidFill>
                 <a:latin typeface="Arial"/>
                 <a:ea typeface="Arial"/>
@@ -16716,7 +16716,7 @@
             <a:r>
               <a:rPr sz="1600" b="1">
                 <a:solidFill>
-                  <a:srgbClr val="1428A0"/>
+                  <a:srgbClr val="3C4FA5"/>
                 </a:solidFill>
                 <a:latin typeface="Arial"/>
                 <a:ea typeface="Arial"/>
@@ -16842,7 +16842,7 @@
             <a:r>
               <a:rPr sz="1800" b="1">
                 <a:solidFill>
-                  <a:srgbClr val="1428A0"/>
+                  <a:srgbClr val="3C4FA5"/>
                 </a:solidFill>
                 <a:latin typeface="Arial"/>
                 <a:ea typeface="Arial"/>
@@ -17016,7 +17016,7 @@
             <a:r>
               <a:rPr sz="1600" b="1">
                 <a:solidFill>
-                  <a:srgbClr val="1428A0"/>
+                  <a:srgbClr val="3C4FA5"/>
                 </a:solidFill>
                 <a:latin typeface="Arial"/>
                 <a:ea typeface="Arial"/>
@@ -17041,7 +17041,7 @@
             <a:avLst/>
           </a:prstGeom>
           <a:solidFill>
-            <a:srgbClr val="1428A0"/>
+            <a:srgbClr val="3C4FA5"/>
           </a:solidFill>
           <a:ln>
             <a:noFill/>
@@ -17100,7 +17100,7 @@
             <a:r>
               <a:rPr sz="1800" b="1">
                 <a:solidFill>
-                  <a:srgbClr val="1428A0"/>
+                  <a:srgbClr val="3C4FA5"/>
                 </a:solidFill>
                 <a:latin typeface="Arial"/>
                 <a:ea typeface="Arial"/>
@@ -17140,7 +17140,7 @@
             <a:r>
               <a:rPr sz="3200" b="1">
                 <a:solidFill>
-                  <a:srgbClr val="1428A0"/>
+                  <a:srgbClr val="3C4FA5"/>
                 </a:solidFill>
                 <a:latin typeface="Arial"/>
                 <a:ea typeface="Arial"/>
@@ -17264,7 +17264,7 @@
             <a:r>
               <a:rPr sz="1800" b="1">
                 <a:solidFill>
-                  <a:srgbClr val="1428A0"/>
+                  <a:srgbClr val="3C4FA5"/>
                 </a:solidFill>
                 <a:latin typeface="Arial"/>
                 <a:ea typeface="Arial"/>
@@ -17438,7 +17438,7 @@
             <a:r>
               <a:rPr sz="1600" b="1">
                 <a:solidFill>
-                  <a:srgbClr val="1428A0"/>
+                  <a:srgbClr val="3C4FA5"/>
                 </a:solidFill>
                 <a:latin typeface="Arial"/>
                 <a:ea typeface="Arial"/>
@@ -17463,7 +17463,7 @@
             <a:avLst/>
           </a:prstGeom>
           <a:solidFill>
-            <a:srgbClr val="1428A0"/>
+            <a:srgbClr val="3C4FA5"/>
           </a:solidFill>
           <a:ln>
             <a:noFill/>
@@ -17522,7 +17522,7 @@
             <a:r>
               <a:rPr sz="1600" b="1">
                 <a:solidFill>
-                  <a:srgbClr val="1428A0"/>
+                  <a:srgbClr val="3C4FA5"/>
                 </a:solidFill>
                 <a:latin typeface="Arial"/>
                 <a:ea typeface="Arial"/>
@@ -17547,7 +17547,7 @@
             <a:avLst/>
           </a:prstGeom>
           <a:solidFill>
-            <a:srgbClr val="1428A0"/>
+            <a:srgbClr val="3C4FA5"/>
           </a:solidFill>
           <a:ln>
             <a:noFill/>
@@ -17606,7 +17606,7 @@
             <a:r>
               <a:rPr sz="2000" b="0">
                 <a:solidFill>
-                  <a:srgbClr val="AAB8E8"/>
+                  <a:srgbClr val="C0CAEC"/>
                 </a:solidFill>
                 <a:latin typeface="Arial"/>
                 <a:ea typeface="Arial"/>
@@ -17784,7 +17784,7 @@
             <a:r>
               <a:rPr sz="1800" b="1">
                 <a:solidFill>
-                  <a:srgbClr val="1428A0"/>
+                  <a:srgbClr val="3C4FA5"/>
                 </a:solidFill>
                 <a:latin typeface="Arial"/>
                 <a:ea typeface="Arial"/>
@@ -17960,7 +17960,7 @@
             <a:avLst/>
           </a:prstGeom>
           <a:solidFill>
-            <a:srgbClr val="1428A0"/>
+            <a:srgbClr val="3C4FA5"/>
           </a:solidFill>
           <a:ln>
             <a:noFill/>
@@ -18303,7 +18303,7 @@
             </a:avLst>
           </a:prstGeom>
           <a:solidFill>
-            <a:srgbClr val="3C5AC8"/>
+            <a:srgbClr val="677ECD"/>
           </a:solidFill>
           <a:ln>
             <a:noFill/>
@@ -18389,7 +18389,7 @@
             </a:avLst>
           </a:prstGeom>
           <a:solidFill>
-            <a:srgbClr val="1428A0"/>
+            <a:srgbClr val="3C4FA5"/>
           </a:solidFill>
           <a:ln>
             <a:noFill/>
@@ -18559,7 +18559,7 @@
             <a:avLst/>
           </a:prstGeom>
           <a:solidFill>
-            <a:srgbClr val="1428A0"/>
+            <a:srgbClr val="3C4FA5"/>
           </a:solidFill>
           <a:ln>
             <a:noFill/>
@@ -18603,7 +18603,7 @@
             <a:avLst/>
           </a:prstGeom>
           <a:solidFill>
-            <a:srgbClr val="1428A0"/>
+            <a:srgbClr val="3C4FA5"/>
           </a:solidFill>
           <a:ln>
             <a:noFill/>
@@ -18647,7 +18647,7 @@
             <a:avLst/>
           </a:prstGeom>
           <a:solidFill>
-            <a:srgbClr val="1428A0"/>
+            <a:srgbClr val="3C4FA5"/>
           </a:solidFill>
           <a:ln>
             <a:noFill/>
@@ -18706,7 +18706,7 @@
             <a:r>
               <a:rPr sz="1800" b="1">
                 <a:solidFill>
-                  <a:srgbClr val="1428A0"/>
+                  <a:srgbClr val="3C4FA5"/>
                 </a:solidFill>
                 <a:latin typeface="Arial"/>
                 <a:ea typeface="Arial"/>
@@ -18723,7 +18723,7 @@
             <a:r>
               <a:rPr sz="1800" b="1">
                 <a:solidFill>
-                  <a:srgbClr val="1428A0"/>
+                  <a:srgbClr val="3C4FA5"/>
                 </a:solidFill>
                 <a:latin typeface="Arial"/>
                 <a:ea typeface="Arial"/>
@@ -18763,7 +18763,7 @@
             <a:r>
               <a:rPr sz="2000" b="1">
                 <a:solidFill>
-                  <a:srgbClr val="1428A0"/>
+                  <a:srgbClr val="3C4FA5"/>
                 </a:solidFill>
                 <a:latin typeface="Arial"/>
                 <a:ea typeface="Arial"/>
@@ -18788,7 +18788,7 @@
             <a:avLst/>
           </a:prstGeom>
           <a:solidFill>
-            <a:srgbClr val="1428A0"/>
+            <a:srgbClr val="3C4FA5"/>
           </a:solidFill>
           <a:ln>
             <a:noFill/>
@@ -18988,11 +18988,11 @@
             </a:avLst>
           </a:prstGeom>
           <a:solidFill>
-            <a:srgbClr val="EEF1FA"/>
+            <a:srgbClr val="F0F2F8"/>
           </a:solidFill>
           <a:ln w="19050">
             <a:solidFill>
-              <a:srgbClr val="1428A0"/>
+              <a:srgbClr val="3C4FA5"/>
             </a:solidFill>
           </a:ln>
           <a:effectLst/>
@@ -19049,7 +19049,7 @@
             <a:r>
               <a:rPr sz="1600" b="1">
                 <a:solidFill>
-                  <a:srgbClr val="1428A0"/>
+                  <a:srgbClr val="3C4FA5"/>
                 </a:solidFill>
                 <a:latin typeface="Arial"/>
                 <a:ea typeface="Arial"/>
@@ -19122,7 +19122,7 @@
             <a:avLst/>
           </a:prstGeom>
           <a:solidFill>
-            <a:srgbClr val="1428A0"/>
+            <a:srgbClr val="3C4FA5"/>
           </a:solidFill>
           <a:ln>
             <a:noFill/>
@@ -19238,7 +19238,7 @@
             <a:r>
               <a:rPr sz="1900" b="1">
                 <a:solidFill>
-                  <a:srgbClr val="1428A0"/>
+                  <a:srgbClr val="3C4FA5"/>
                 </a:solidFill>
                 <a:latin typeface="Arial"/>
                 <a:ea typeface="Arial"/>
@@ -19280,7 +19280,7 @@
             <a:avLst/>
           </a:prstGeom>
           <a:solidFill>
-            <a:srgbClr val="3C5AC8"/>
+            <a:srgbClr val="677ECD"/>
           </a:solidFill>
           <a:ln>
             <a:noFill/>
@@ -19372,7 +19372,7 @@
             <a:avLst/>
           </a:prstGeom>
           <a:solidFill>
-            <a:srgbClr val="1428A0"/>
+            <a:srgbClr val="3C4FA5"/>
           </a:solidFill>
           <a:ln>
             <a:noFill/>
@@ -19488,7 +19488,7 @@
             <a:r>
               <a:rPr sz="1900" b="1">
                 <a:solidFill>
-                  <a:srgbClr val="1428A0"/>
+                  <a:srgbClr val="3C4FA5"/>
                 </a:solidFill>
                 <a:latin typeface="Arial"/>
                 <a:ea typeface="Arial"/>
@@ -19530,7 +19530,7 @@
             <a:avLst/>
           </a:prstGeom>
           <a:solidFill>
-            <a:srgbClr val="3C5AC8"/>
+            <a:srgbClr val="677ECD"/>
           </a:solidFill>
           <a:ln>
             <a:noFill/>
@@ -19622,7 +19622,7 @@
             <a:avLst/>
           </a:prstGeom>
           <a:solidFill>
-            <a:srgbClr val="1428A0"/>
+            <a:srgbClr val="3C4FA5"/>
           </a:solidFill>
           <a:ln>
             <a:noFill/>
@@ -19738,7 +19738,7 @@
             <a:r>
               <a:rPr sz="1900" b="1">
                 <a:solidFill>
-                  <a:srgbClr val="1428A0"/>
+                  <a:srgbClr val="3C4FA5"/>
                 </a:solidFill>
                 <a:latin typeface="Arial"/>
                 <a:ea typeface="Arial"/>
@@ -19795,7 +19795,7 @@
             <a:r>
               <a:rPr sz="2000" b="1">
                 <a:solidFill>
-                  <a:srgbClr val="1428A0"/>
+                  <a:srgbClr val="3C4FA5"/>
                 </a:solidFill>
                 <a:latin typeface="Arial"/>
                 <a:ea typeface="Arial"/>
@@ -19820,7 +19820,7 @@
             <a:avLst/>
           </a:prstGeom>
           <a:solidFill>
-            <a:srgbClr val="1428A0"/>
+            <a:srgbClr val="3C4FA5"/>
           </a:solidFill>
           <a:ln>
             <a:noFill/>
@@ -19999,7 +19999,7 @@
             <a:r>
               <a:rPr sz="1800" b="1">
                 <a:solidFill>
-                  <a:srgbClr val="1428A0"/>
+                  <a:srgbClr val="3C4FA5"/>
                 </a:solidFill>
                 <a:latin typeface="Arial"/>
                 <a:ea typeface="Arial"/>
@@ -20039,7 +20039,7 @@
             <a:r>
               <a:rPr sz="1800" b="1">
                 <a:solidFill>
-                  <a:srgbClr val="1428A0"/>
+                  <a:srgbClr val="3C4FA5"/>
                 </a:solidFill>
                 <a:latin typeface="Arial"/>
                 <a:ea typeface="Arial"/>
@@ -20155,7 +20155,7 @@
             </a:avLst>
           </a:prstGeom>
           <a:solidFill>
-            <a:srgbClr val="1428A0"/>
+            <a:srgbClr val="3C4FA5"/>
           </a:solidFill>
           <a:ln>
             <a:noFill/>
@@ -20254,7 +20254,7 @@
             <a:r>
               <a:rPr sz="1800" b="1">
                 <a:solidFill>
-                  <a:srgbClr val="1428A0"/>
+                  <a:srgbClr val="3C4FA5"/>
                 </a:solidFill>
                 <a:latin typeface="Arial"/>
                 <a:ea typeface="Arial"/>
@@ -20367,7 +20367,7 @@
             </a:avLst>
           </a:prstGeom>
           <a:solidFill>
-            <a:srgbClr val="1428A0"/>
+            <a:srgbClr val="3C4FA5"/>
           </a:solidFill>
           <a:ln>
             <a:noFill/>
@@ -20466,7 +20466,7 @@
             <a:r>
               <a:rPr sz="1800" b="1">
                 <a:solidFill>
-                  <a:srgbClr val="1428A0"/>
+                  <a:srgbClr val="3C4FA5"/>
                 </a:solidFill>
                 <a:latin typeface="Arial"/>
                 <a:ea typeface="Arial"/>
@@ -20579,7 +20579,7 @@
             </a:avLst>
           </a:prstGeom>
           <a:solidFill>
-            <a:srgbClr val="1428A0"/>
+            <a:srgbClr val="3C4FA5"/>
           </a:solidFill>
           <a:ln>
             <a:noFill/>
@@ -20791,7 +20791,7 @@
             </a:avLst>
           </a:prstGeom>
           <a:solidFill>
-            <a:srgbClr val="3C5AC8"/>
+            <a:srgbClr val="677ECD"/>
           </a:solidFill>
           <a:ln>
             <a:noFill/>
@@ -21003,7 +21003,7 @@
             </a:avLst>
           </a:prstGeom>
           <a:solidFill>
-            <a:srgbClr val="AAB8E8"/>
+            <a:srgbClr val="C0CAEC"/>
           </a:solidFill>
           <a:ln>
             <a:noFill/>
@@ -21102,7 +21102,7 @@
             <a:r>
               <a:rPr sz="2000" b="1">
                 <a:solidFill>
-                  <a:srgbClr val="1428A0"/>
+                  <a:srgbClr val="3C4FA5"/>
                 </a:solidFill>
                 <a:latin typeface="Arial"/>
                 <a:ea typeface="Arial"/>
@@ -21305,7 +21305,7 @@
             <a:avLst/>
           </a:prstGeom>
           <a:solidFill>
-            <a:srgbClr val="1428A0"/>
+            <a:srgbClr val="3C4FA5"/>
           </a:solidFill>
           <a:ln>
             <a:noFill/>
@@ -21441,7 +21441,7 @@
             </a:avLst>
           </a:prstGeom>
           <a:solidFill>
-            <a:srgbClr val="1428A0"/>
+            <a:srgbClr val="3C4FA5"/>
           </a:solidFill>
           <a:ln>
             <a:noFill/>
@@ -21531,7 +21531,7 @@
           </a:solidFill>
           <a:ln w="12700">
             <a:solidFill>
-              <a:srgbClr val="1428A0"/>
+              <a:srgbClr val="3C4FA5"/>
             </a:solidFill>
           </a:ln>
           <a:effectLst/>
@@ -21588,7 +21588,7 @@
             <a:r>
               <a:rPr sz="1800" b="1">
                 <a:solidFill>
-                  <a:srgbClr val="1428A0"/>
+                  <a:srgbClr val="3C4FA5"/>
                 </a:solidFill>
                 <a:latin typeface="Arial"/>
                 <a:ea typeface="Arial"/>
@@ -21619,7 +21619,7 @@
           </a:solidFill>
           <a:ln w="12700">
             <a:solidFill>
-              <a:srgbClr val="1428A0"/>
+              <a:srgbClr val="3C4FA5"/>
             </a:solidFill>
           </a:ln>
           <a:effectLst/>
@@ -21676,7 +21676,7 @@
             <a:r>
               <a:rPr sz="1800" b="1">
                 <a:solidFill>
-                  <a:srgbClr val="1428A0"/>
+                  <a:srgbClr val="3C4FA5"/>
                 </a:solidFill>
                 <a:latin typeface="Arial"/>
                 <a:ea typeface="Arial"/>
@@ -21707,7 +21707,7 @@
           </a:solidFill>
           <a:ln w="12700">
             <a:solidFill>
-              <a:srgbClr val="1428A0"/>
+              <a:srgbClr val="3C4FA5"/>
             </a:solidFill>
           </a:ln>
           <a:effectLst/>
@@ -21764,7 +21764,7 @@
             <a:r>
               <a:rPr sz="1800" b="1">
                 <a:solidFill>
-                  <a:srgbClr val="1428A0"/>
+                  <a:srgbClr val="3C4FA5"/>
                 </a:solidFill>
                 <a:latin typeface="Arial"/>
                 <a:ea typeface="Arial"/>
@@ -21829,7 +21829,7 @@
             <a:avLst/>
           </a:prstGeom>
           <a:solidFill>
-            <a:srgbClr val="1428A0"/>
+            <a:srgbClr val="3C4FA5"/>
           </a:solidFill>
           <a:ln>
             <a:noFill/>
@@ -21888,7 +21888,7 @@
             <a:r>
               <a:rPr sz="2000" b="0">
                 <a:solidFill>
-                  <a:srgbClr val="AAB8E8"/>
+                  <a:srgbClr val="C0CAEC"/>
                 </a:solidFill>
                 <a:latin typeface="Arial"/>
                 <a:ea typeface="Arial"/>
@@ -22066,7 +22066,7 @@
             <a:r>
               <a:rPr sz="1800" b="1">
                 <a:solidFill>
-                  <a:srgbClr val="1428A0"/>
+                  <a:srgbClr val="3C4FA5"/>
                 </a:solidFill>
                 <a:latin typeface="Arial"/>
                 <a:ea typeface="Arial"/>
@@ -22242,7 +22242,7 @@
             <a:avLst/>
           </a:prstGeom>
           <a:solidFill>
-            <a:srgbClr val="1428A0"/>
+            <a:srgbClr val="3C4FA5"/>
           </a:solidFill>
           <a:ln>
             <a:noFill/>
@@ -22530,7 +22530,7 @@
             <a:avLst/>
           </a:prstGeom>
           <a:solidFill>
-            <a:srgbClr val="1428A0"/>
+            <a:srgbClr val="3C4FA5"/>
           </a:solidFill>
           <a:ln>
             <a:noFill/>
@@ -22589,7 +22589,7 @@
             <a:r>
               <a:rPr sz="1800" b="1">
                 <a:solidFill>
-                  <a:srgbClr val="1428A0"/>
+                  <a:srgbClr val="3C4FA5"/>
                 </a:solidFill>
                 <a:latin typeface="Arial"/>
                 <a:ea typeface="Arial"/>
@@ -22818,7 +22818,7 @@
             <a:avLst/>
           </a:prstGeom>
           <a:solidFill>
-            <a:srgbClr val="1428A0"/>
+            <a:srgbClr val="3C4FA5"/>
           </a:solidFill>
           <a:ln>
             <a:noFill/>
@@ -22877,7 +22877,7 @@
             <a:r>
               <a:rPr sz="1800" b="1">
                 <a:solidFill>
-                  <a:srgbClr val="1428A0"/>
+                  <a:srgbClr val="3C4FA5"/>
                 </a:solidFill>
                 <a:latin typeface="Arial"/>
                 <a:ea typeface="Arial"/>
@@ -23106,7 +23106,7 @@
             <a:avLst/>
           </a:prstGeom>
           <a:solidFill>
-            <a:srgbClr val="1428A0"/>
+            <a:srgbClr val="3C4FA5"/>
           </a:solidFill>
           <a:ln>
             <a:noFill/>
@@ -23165,7 +23165,7 @@
             <a:r>
               <a:rPr sz="1800" b="1">
                 <a:solidFill>
-                  <a:srgbClr val="1428A0"/>
+                  <a:srgbClr val="3C4FA5"/>
                 </a:solidFill>
                 <a:latin typeface="Arial"/>
                 <a:ea typeface="Arial"/>
@@ -23230,7 +23230,7 @@
             <a:avLst/>
           </a:prstGeom>
           <a:solidFill>
-            <a:srgbClr val="1428A0"/>
+            <a:srgbClr val="3C4FA5"/>
           </a:solidFill>
           <a:ln>
             <a:noFill/>
@@ -23806,7 +23806,7 @@
             <a:avLst/>
           </a:prstGeom>
           <a:solidFill>
-            <a:srgbClr val="1428A0"/>
+            <a:srgbClr val="3C4FA5"/>
           </a:solidFill>
           <a:ln>
             <a:noFill/>
@@ -23865,7 +23865,7 @@
             <a:r>
               <a:rPr sz="1600" b="1">
                 <a:solidFill>
-                  <a:srgbClr val="1428A0"/>
+                  <a:srgbClr val="3C4FA5"/>
                 </a:solidFill>
                 <a:latin typeface="Arial"/>
                 <a:ea typeface="Arial"/>
@@ -24210,7 +24210,7 @@
             <a:avLst/>
           </a:prstGeom>
           <a:solidFill>
-            <a:srgbClr val="1428A0"/>
+            <a:srgbClr val="3C4FA5"/>
           </a:solidFill>
           <a:ln>
             <a:noFill/>
@@ -24876,7 +24876,7 @@
             <a:avLst/>
           </a:prstGeom>
           <a:solidFill>
-            <a:srgbClr val="AAB8E8"/>
+            <a:srgbClr val="C0CAEC"/>
           </a:solidFill>
           <a:ln>
             <a:noFill/>
@@ -25000,7 +25000,7 @@
             <a:avLst/>
           </a:prstGeom>
           <a:solidFill>
-            <a:srgbClr val="1428A0"/>
+            <a:srgbClr val="3C4FA5"/>
           </a:solidFill>
           <a:ln>
             <a:noFill/>
@@ -25059,7 +25059,7 @@
             <a:r>
               <a:rPr sz="1500" b="1">
                 <a:solidFill>
-                  <a:srgbClr val="1428A0"/>
+                  <a:srgbClr val="3C4FA5"/>
                 </a:solidFill>
                 <a:latin typeface="Arial"/>
                 <a:ea typeface="Arial"/>
@@ -25124,7 +25124,7 @@
             <a:avLst/>
           </a:prstGeom>
           <a:solidFill>
-            <a:srgbClr val="AAB8E8"/>
+            <a:srgbClr val="C0CAEC"/>
           </a:solidFill>
           <a:ln>
             <a:noFill/>
@@ -25208,7 +25208,7 @@
             <a:avLst/>
           </a:prstGeom>
           <a:solidFill>
-            <a:srgbClr val="1428A0"/>
+            <a:srgbClr val="3C4FA5"/>
           </a:solidFill>
           <a:ln>
             <a:noFill/>
@@ -25511,7 +25511,7 @@
             <a:r>
               <a:rPr sz="1600" b="1">
                 <a:solidFill>
-                  <a:srgbClr val="1428A0"/>
+                  <a:srgbClr val="3C4FA5"/>
                 </a:solidFill>
                 <a:latin typeface="Arial"/>
                 <a:ea typeface="Arial"/>
@@ -25536,7 +25536,7 @@
             <a:avLst/>
           </a:prstGeom>
           <a:solidFill>
-            <a:srgbClr val="1428A0"/>
+            <a:srgbClr val="3C4FA5"/>
           </a:solidFill>
           <a:ln>
             <a:noFill/>
@@ -25595,7 +25595,7 @@
             <a:r>
               <a:rPr sz="1600" b="1">
                 <a:solidFill>
-                  <a:srgbClr val="1428A0"/>
+                  <a:srgbClr val="3C4FA5"/>
                 </a:solidFill>
                 <a:latin typeface="Arial"/>
                 <a:ea typeface="Arial"/>
@@ -25799,7 +25799,7 @@
             <a:r>
               <a:rPr sz="1500" b="1">
                 <a:solidFill>
-                  <a:srgbClr val="1428A0"/>
+                  <a:srgbClr val="3C4FA5"/>
                 </a:solidFill>
                 <a:latin typeface="Arial"/>
                 <a:ea typeface="Arial"/>
@@ -25824,7 +25824,7 @@
             <a:avLst/>
           </a:prstGeom>
           <a:solidFill>
-            <a:srgbClr val="1428A0"/>
+            <a:srgbClr val="3C4FA5"/>
           </a:solidFill>
           <a:ln>
             <a:noFill/>
@@ -25883,7 +25883,7 @@
             <a:r>
               <a:rPr sz="1500" b="1">
                 <a:solidFill>
-                  <a:srgbClr val="1428A0"/>
+                  <a:srgbClr val="3C4FA5"/>
                 </a:solidFill>
                 <a:latin typeface="Arial"/>
                 <a:ea typeface="Arial"/>
@@ -25923,7 +25923,7 @@
             <a:r>
               <a:rPr sz="1500" b="1">
                 <a:solidFill>
-                  <a:srgbClr val="1428A0"/>
+                  <a:srgbClr val="3C4FA5"/>
                 </a:solidFill>
                 <a:latin typeface="Arial"/>
                 <a:ea typeface="Arial"/>
@@ -25948,7 +25948,7 @@
             <a:avLst/>
           </a:prstGeom>
           <a:solidFill>
-            <a:srgbClr val="1428A0"/>
+            <a:srgbClr val="3C4FA5"/>
           </a:solidFill>
           <a:ln>
             <a:noFill/>
@@ -26007,7 +26007,7 @@
             <a:r>
               <a:rPr sz="1500" b="1">
                 <a:solidFill>
-                  <a:srgbClr val="1428A0"/>
+                  <a:srgbClr val="3C4FA5"/>
                 </a:solidFill>
                 <a:latin typeface="Arial"/>
                 <a:ea typeface="Arial"/>
@@ -26241,7 +26241,7 @@
             <a:r>
               <a:rPr sz="1800" b="1">
                 <a:solidFill>
-                  <a:srgbClr val="1428A0"/>
+                  <a:srgbClr val="3C4FA5"/>
                 </a:solidFill>
                 <a:latin typeface="Arial"/>
                 <a:ea typeface="Arial"/>
@@ -26417,7 +26417,7 @@
             <a:avLst/>
           </a:prstGeom>
           <a:solidFill>
-            <a:srgbClr val="1428A0"/>
+            <a:srgbClr val="3C4FA5"/>
           </a:solidFill>
           <a:ln>
             <a:noFill/>
@@ -26760,7 +26760,7 @@
             <a:r>
               <a:rPr sz="1500" b="1">
                 <a:solidFill>
-                  <a:srgbClr val="1428A0"/>
+                  <a:srgbClr val="3C4FA5"/>
                 </a:solidFill>
                 <a:latin typeface="Arial"/>
                 <a:ea typeface="Arial"/>
@@ -26785,7 +26785,7 @@
             <a:avLst/>
           </a:prstGeom>
           <a:solidFill>
-            <a:srgbClr val="1428A0"/>
+            <a:srgbClr val="3C4FA5"/>
           </a:solidFill>
           <a:ln>
             <a:noFill/>
@@ -26844,7 +26844,7 @@
             <a:r>
               <a:rPr sz="1500" b="1">
                 <a:solidFill>
-                  <a:srgbClr val="1428A0"/>
+                  <a:srgbClr val="3C4FA5"/>
                 </a:solidFill>
                 <a:latin typeface="Arial"/>
                 <a:ea typeface="Arial"/>
@@ -27008,7 +27008,7 @@
             <a:r>
               <a:rPr sz="1500" b="1">
                 <a:solidFill>
-                  <a:srgbClr val="1428A0"/>
+                  <a:srgbClr val="3C4FA5"/>
                 </a:solidFill>
                 <a:latin typeface="Arial"/>
                 <a:ea typeface="Arial"/>
@@ -27033,7 +27033,7 @@
             <a:avLst/>
           </a:prstGeom>
           <a:solidFill>
-            <a:srgbClr val="1428A0"/>
+            <a:srgbClr val="3C4FA5"/>
           </a:solidFill>
           <a:ln>
             <a:noFill/>
@@ -27092,7 +27092,7 @@
             <a:r>
               <a:rPr sz="1500" b="1">
                 <a:solidFill>
-                  <a:srgbClr val="1428A0"/>
+                  <a:srgbClr val="3C4FA5"/>
                 </a:solidFill>
                 <a:latin typeface="Arial"/>
                 <a:ea typeface="Arial"/>
@@ -27296,7 +27296,7 @@
             <a:r>
               <a:rPr sz="1500" b="1">
                 <a:solidFill>
-                  <a:srgbClr val="1428A0"/>
+                  <a:srgbClr val="3C4FA5"/>
                 </a:solidFill>
                 <a:latin typeface="Arial"/>
                 <a:ea typeface="Arial"/>
@@ -27321,7 +27321,7 @@
             <a:avLst/>
           </a:prstGeom>
           <a:solidFill>
-            <a:srgbClr val="1428A0"/>
+            <a:srgbClr val="3C4FA5"/>
           </a:solidFill>
           <a:ln>
             <a:noFill/>
@@ -27380,7 +27380,7 @@
             <a:r>
               <a:rPr sz="1500" b="1">
                 <a:solidFill>
-                  <a:srgbClr val="1428A0"/>
+                  <a:srgbClr val="3C4FA5"/>
                 </a:solidFill>
                 <a:latin typeface="Arial"/>
                 <a:ea typeface="Arial"/>
@@ -27544,7 +27544,7 @@
             <a:r>
               <a:rPr sz="1500" b="1">
                 <a:solidFill>
-                  <a:srgbClr val="1428A0"/>
+                  <a:srgbClr val="3C4FA5"/>
                 </a:solidFill>
                 <a:latin typeface="Arial"/>
                 <a:ea typeface="Arial"/>
@@ -27569,7 +27569,7 @@
             <a:avLst/>
           </a:prstGeom>
           <a:solidFill>
-            <a:srgbClr val="1428A0"/>
+            <a:srgbClr val="3C4FA5"/>
           </a:solidFill>
           <a:ln>
             <a:noFill/>
@@ -27628,7 +27628,7 @@
             <a:r>
               <a:rPr sz="1500" b="1">
                 <a:solidFill>
-                  <a:srgbClr val="1428A0"/>
+                  <a:srgbClr val="3C4FA5"/>
                 </a:solidFill>
                 <a:latin typeface="Arial"/>
                 <a:ea typeface="Arial"/>
@@ -27756,7 +27756,7 @@
             <a:avLst/>
           </a:prstGeom>
           <a:solidFill>
-            <a:srgbClr val="1428A0"/>
+            <a:srgbClr val="3C4FA5"/>
           </a:solidFill>
           <a:ln>
             <a:noFill/>
@@ -28271,7 +28271,7 @@
             <a:r>
               <a:rPr sz="1500" b="1">
                 <a:solidFill>
-                  <a:srgbClr val="1428A0"/>
+                  <a:srgbClr val="3C4FA5"/>
                 </a:solidFill>
                 <a:latin typeface="Arial"/>
                 <a:ea typeface="Arial"/>
@@ -28340,7 +28340,7 @@
             <a:avLst/>
           </a:prstGeom>
           <a:solidFill>
-            <a:srgbClr val="1428A0"/>
+            <a:srgbClr val="3C4FA5"/>
           </a:solidFill>
           <a:ln>
             <a:noFill/>
@@ -28399,7 +28399,7 @@
             <a:r>
               <a:rPr sz="1500" b="1">
                 <a:solidFill>
-                  <a:srgbClr val="1428A0"/>
+                  <a:srgbClr val="3C4FA5"/>
                 </a:solidFill>
                 <a:latin typeface="Arial"/>
                 <a:ea typeface="Arial"/>
@@ -28519,7 +28519,7 @@
             <a:r>
               <a:rPr sz="1800" b="1">
                 <a:solidFill>
-                  <a:srgbClr val="1428A0"/>
+                  <a:srgbClr val="3C4FA5"/>
                 </a:solidFill>
                 <a:latin typeface="Arial"/>
                 <a:ea typeface="Arial"/>
@@ -28599,7 +28599,7 @@
             <a:r>
               <a:rPr sz="1800" b="1">
                 <a:solidFill>
-                  <a:srgbClr val="1428A0"/>
+                  <a:srgbClr val="3C4FA5"/>
                 </a:solidFill>
                 <a:latin typeface="Arial"/>
                 <a:ea typeface="Arial"/>
@@ -28679,7 +28679,7 @@
             <a:r>
               <a:rPr sz="1800" b="1">
                 <a:solidFill>
-                  <a:srgbClr val="1428A0"/>
+                  <a:srgbClr val="3C4FA5"/>
                 </a:solidFill>
                 <a:latin typeface="Arial"/>
                 <a:ea typeface="Arial"/>
@@ -28807,7 +28807,7 @@
             <a:avLst/>
           </a:prstGeom>
           <a:solidFill>
-            <a:srgbClr val="1428A0"/>
+            <a:srgbClr val="3C4FA5"/>
           </a:solidFill>
           <a:ln>
             <a:noFill/>
@@ -29344,7 +29344,7 @@
           </a:prstGeom>
           <a:ln w="31750">
             <a:solidFill>
-              <a:srgbClr val="1428A0"/>
+              <a:srgbClr val="3C4FA5"/>
             </a:solidFill>
           </a:ln>
         </p:spPr>
@@ -29379,7 +29379,7 @@
           </a:prstGeom>
           <a:ln w="31750">
             <a:solidFill>
-              <a:srgbClr val="1428A0"/>
+              <a:srgbClr val="3C4FA5"/>
             </a:solidFill>
           </a:ln>
         </p:spPr>
@@ -29414,7 +29414,7 @@
           </a:prstGeom>
           <a:ln w="31750">
             <a:solidFill>
-              <a:srgbClr val="1428A0"/>
+              <a:srgbClr val="3C4FA5"/>
             </a:solidFill>
           </a:ln>
         </p:spPr>
@@ -29449,7 +29449,7 @@
           </a:prstGeom>
           <a:ln w="31750">
             <a:solidFill>
-              <a:srgbClr val="1428A0"/>
+              <a:srgbClr val="3C4FA5"/>
             </a:solidFill>
           </a:ln>
         </p:spPr>
@@ -29484,7 +29484,7 @@
           </a:prstGeom>
           <a:ln w="31750">
             <a:solidFill>
-              <a:srgbClr val="1428A0"/>
+              <a:srgbClr val="3C4FA5"/>
             </a:solidFill>
           </a:ln>
         </p:spPr>
@@ -29518,7 +29518,7 @@
             <a:avLst/>
           </a:prstGeom>
           <a:solidFill>
-            <a:srgbClr val="1428A0"/>
+            <a:srgbClr val="3C4FA5"/>
           </a:solidFill>
           <a:ln>
             <a:noFill/>
@@ -29577,7 +29577,7 @@
             <a:r>
               <a:rPr sz="1600" b="1">
                 <a:solidFill>
-                  <a:srgbClr val="1428A0"/>
+                  <a:srgbClr val="3C4FA5"/>
                 </a:solidFill>
                 <a:latin typeface="Arial"/>
                 <a:ea typeface="Arial"/>
@@ -29602,7 +29602,7 @@
             <a:avLst/>
           </a:prstGeom>
           <a:solidFill>
-            <a:srgbClr val="1428A0"/>
+            <a:srgbClr val="3C4FA5"/>
           </a:solidFill>
           <a:ln>
             <a:noFill/>
@@ -29661,7 +29661,7 @@
             <a:r>
               <a:rPr sz="1600" b="1">
                 <a:solidFill>
-                  <a:srgbClr val="1428A0"/>
+                  <a:srgbClr val="3C4FA5"/>
                 </a:solidFill>
                 <a:latin typeface="Arial"/>
                 <a:ea typeface="Arial"/>
@@ -29726,7 +29726,7 @@
             <a:avLst/>
           </a:prstGeom>
           <a:solidFill>
-            <a:srgbClr val="AAB8E8"/>
+            <a:srgbClr val="C0CAEC"/>
           </a:solidFill>
           <a:ln>
             <a:noFill/>
@@ -29854,7 +29854,7 @@
             <a:avLst/>
           </a:prstGeom>
           <a:solidFill>
-            <a:srgbClr val="AAB8E8"/>
+            <a:srgbClr val="C0CAEC"/>
           </a:solidFill>
           <a:ln>
             <a:noFill/>
@@ -29982,7 +29982,7 @@
             <a:avLst/>
           </a:prstGeom>
           <a:solidFill>
-            <a:srgbClr val="AAB8E8"/>
+            <a:srgbClr val="C0CAEC"/>
           </a:solidFill>
           <a:ln>
             <a:noFill/>
@@ -30219,7 +30219,7 @@
           </a:solidFill>
           <a:ln w="12700">
             <a:solidFill>
-              <a:srgbClr val="1428A0"/>
+              <a:srgbClr val="3C4FA5"/>
             </a:solidFill>
           </a:ln>
           <a:effectLst/>
@@ -30276,7 +30276,7 @@
             <a:r>
               <a:rPr sz="1600" b="1">
                 <a:solidFill>
-                  <a:srgbClr val="1428A0"/>
+                  <a:srgbClr val="3C4FA5"/>
                 </a:solidFill>
                 <a:latin typeface="Arial"/>
                 <a:ea typeface="Arial"/>
